--- a/docs/janawaaz-deck.pptx
+++ b/docs/janawaaz-deck.pptx
@@ -4209,7 +4209,7 @@
               </a:defRPr>
             </a:pPr>
             <a:r>
-              <a:t>—  Weak evidence → feed only. Rejected → ledger only. Every decision immutable and public</a:t>
+              <a:t>—  Weak evidence → audit only. Verifier rejection → ledger. Every evaluated candidate is public</a:t>
             </a:r>
           </a:p>
           <a:p>
